--- a/assets/pptx/catalog-607.pptx
+++ b/assets/pptx/catalog-607.pptx
@@ -3269,7 +3269,7 @@
                 <a:ea typeface="Ebrima"/>
                 <a:cs typeface="Ebrima"/>
               </a:rPr>
-              <a:t>ስለዚህ አምላኬ እወድሃለሁ (2x)</a:t>
+              <a:t>ስለዚህ አምላኬ እወድሃለሁ 2x</a:t>
             </a:r>
           </a:p>
         </p:txBody>
@@ -3604,7 +3604,7 @@
                 <a:ea typeface="Ebrima"/>
                 <a:cs typeface="Ebrima"/>
               </a:rPr>
-              <a:t>ሕይወቴ አንተ ነህ ሌላም የለኝም (2x)</a:t>
+              <a:t>ሕይወቴ አንተ ነህ ሌላም የለኝም 2x</a:t>
             </a:r>
           </a:p>
         </p:txBody>
@@ -3805,7 +3805,7 @@
                 <a:ea typeface="Ebrima"/>
                 <a:cs typeface="Ebrima"/>
               </a:rPr>
-              <a:t>ሕይወቴ ነህ አንተ ለእኔ (2x)</a:t>
+              <a:t>ሕይወቴ ነህ አንተ ለእኔ 2x</a:t>
             </a:r>
           </a:p>
         </p:txBody>
@@ -4743,7 +4743,7 @@
                 <a:ea typeface="Ebrima"/>
                 <a:cs typeface="Ebrima"/>
               </a:rPr>
-              <a:t>(2x) ዕረፍቴ ነህ አንተ ለእኔ ሰላሜ ነህ አንተ ለእኔ</a:t>
+              <a:t>2x ዕረፍቴ ነህ አንተ ለእኔ ሰላሜ ነህ አንተ ለእኔ</a:t>
             </a:r>
           </a:p>
         </p:txBody>
@@ -4877,7 +4877,7 @@
                 <a:ea typeface="Ebrima"/>
                 <a:cs typeface="Ebrima"/>
               </a:rPr>
-              <a:t>የልቤ አምላክ ሆይ ፍቅርህ ብርቱ ነው (2x)</a:t>
+              <a:t>የልቤ አምላክ ሆይ ፍቅርህ ብርቱ ነው 2x</a:t>
             </a:r>
           </a:p>
         </p:txBody>
